--- a/slides/Toan11/Slide_TOAN11_Bai3_T6-7.pptx
+++ b/slides/Toan11/Slide_TOAN11_Bai3_T6-7.pptx
@@ -5309,7 +5309,7 @@
                 </a:pPr>
                 <a:r>
                   <a:rPr lang="vi-VN"/>
-                  <a:t>T(t)=a+b\sin\ \frac{\pi(t-c)}{12}</a:t>
+                  <a:t>T(t)=a+b\sin\ \frac{\pi(t−c)}{12}</a:t>
                 </a:r>
               </a:p>
               <a:p>
